--- a/docs/pitch/Mercor-Creators-Domain-v2.pptx
+++ b/docs/pitch/Mercor-Creators-Domain-v2.pptx
@@ -14696,7 +14696,7 @@
         <p:spPr>
           <a:xfrm>
             <a:off x="640080" y="2880360"/>
-            <a:ext cx="4900000" cy="2200000"/>
+            <a:ext cx="4900000" cy="2050000"/>
           </a:xfrm>
           <a:prstGeom prst="roundRect">
             <a:avLst>
@@ -14744,7 +14744,7 @@
         <p:spPr>
           <a:xfrm>
             <a:off x="5820080" y="2880360"/>
-            <a:ext cx="5731515" cy="2200000"/>
+            <a:ext cx="5731515" cy="2050000"/>
           </a:xfrm>
           <a:prstGeom prst="roundRect">
             <a:avLst>
@@ -14897,7 +14897,7 @@
         <p:spPr>
           <a:xfrm>
             <a:off x="2270080" y="3460360"/>
-            <a:ext cx="3200000" cy="440000"/>
+            <a:ext cx="3200000" cy="390000"/>
           </a:xfrm>
           <a:prstGeom prst="rect">
             <a:avLst/>
@@ -14967,7 +14967,7 @@
         <p:spPr>
           <a:xfrm>
             <a:off x="7450080" y="3460360"/>
-            <a:ext cx="4031515" cy="440000"/>
+            <a:ext cx="4031515" cy="390000"/>
           </a:xfrm>
           <a:prstGeom prst="rect">
             <a:avLst/>
@@ -15001,7 +15001,7 @@
         </p:nvCxnSpPr>
         <p:spPr>
           <a:xfrm>
-            <a:off x="720080" y="3950360"/>
+            <a:off x="720080" y="3900360"/>
             <a:ext cx="4740000" cy="0"/>
           </a:xfrm>
           <a:prstGeom prst="line">
@@ -15036,7 +15036,7 @@
         </p:nvCxnSpPr>
         <p:spPr>
           <a:xfrm>
-            <a:off x="5900080" y="3950360"/>
+            <a:off x="5900080" y="3900360"/>
             <a:ext cx="5571515" cy="0"/>
           </a:xfrm>
           <a:prstGeom prst="line">
@@ -15071,7 +15071,7 @@
         </p:nvSpPr>
         <p:spPr>
           <a:xfrm>
-            <a:off x="890080" y="3980360"/>
+            <a:off x="890080" y="3930360"/>
             <a:ext cx="1320000" cy="220000"/>
           </a:xfrm>
           <a:prstGeom prst="rect">
@@ -15106,8 +15106,8 @@
         </p:nvSpPr>
         <p:spPr>
           <a:xfrm>
-            <a:off x="2270080" y="3960360"/>
-            <a:ext cx="3200000" cy="440000"/>
+            <a:off x="2270080" y="3910360"/>
+            <a:ext cx="3200000" cy="390000"/>
           </a:xfrm>
           <a:prstGeom prst="rect">
             <a:avLst/>
@@ -15141,7 +15141,7 @@
         </p:nvSpPr>
         <p:spPr>
           <a:xfrm>
-            <a:off x="6070080" y="3980360"/>
+            <a:off x="6070080" y="3930360"/>
             <a:ext cx="1320000" cy="220000"/>
           </a:xfrm>
           <a:prstGeom prst="rect">
@@ -15176,8 +15176,8 @@
         </p:nvSpPr>
         <p:spPr>
           <a:xfrm>
-            <a:off x="7450080" y="3960360"/>
-            <a:ext cx="4031515" cy="440000"/>
+            <a:off x="7450080" y="3910360"/>
+            <a:ext cx="4031515" cy="390000"/>
           </a:xfrm>
           <a:prstGeom prst="rect">
             <a:avLst/>
@@ -15211,7 +15211,7 @@
         </p:nvCxnSpPr>
         <p:spPr>
           <a:xfrm>
-            <a:off x="720080" y="4450360"/>
+            <a:off x="720080" y="4350360"/>
             <a:ext cx="4740000" cy="0"/>
           </a:xfrm>
           <a:prstGeom prst="line">
@@ -15246,7 +15246,7 @@
         </p:nvCxnSpPr>
         <p:spPr>
           <a:xfrm>
-            <a:off x="5900080" y="4450360"/>
+            <a:off x="5900080" y="4350360"/>
             <a:ext cx="5571515" cy="0"/>
           </a:xfrm>
           <a:prstGeom prst="line">
@@ -15281,7 +15281,7 @@
         </p:nvSpPr>
         <p:spPr>
           <a:xfrm>
-            <a:off x="890080" y="4480360"/>
+            <a:off x="890080" y="4380360"/>
             <a:ext cx="1320000" cy="220000"/>
           </a:xfrm>
           <a:prstGeom prst="rect">
@@ -15316,8 +15316,8 @@
         </p:nvSpPr>
         <p:spPr>
           <a:xfrm>
-            <a:off x="2270080" y="4460360"/>
-            <a:ext cx="3200000" cy="440000"/>
+            <a:off x="2270080" y="4360360"/>
+            <a:ext cx="3200000" cy="390000"/>
           </a:xfrm>
           <a:prstGeom prst="rect">
             <a:avLst/>
@@ -15351,7 +15351,7 @@
         </p:nvSpPr>
         <p:spPr>
           <a:xfrm>
-            <a:off x="6070080" y="4480360"/>
+            <a:off x="6070080" y="4380360"/>
             <a:ext cx="1320000" cy="220000"/>
           </a:xfrm>
           <a:prstGeom prst="rect">
@@ -15386,8 +15386,8 @@
         </p:nvSpPr>
         <p:spPr>
           <a:xfrm>
-            <a:off x="7450080" y="4460360"/>
-            <a:ext cx="4031515" cy="440000"/>
+            <a:off x="7450080" y="4360360"/>
+            <a:ext cx="4031515" cy="390000"/>
           </a:xfrm>
           <a:prstGeom prst="rect">
             <a:avLst/>
@@ -15421,8 +15421,8 @@
         </p:nvSpPr>
         <p:spPr>
           <a:xfrm>
-            <a:off x="640080" y="5310360"/>
-            <a:ext cx="3503838" cy="900000"/>
+            <a:off x="640080" y="5150360"/>
+            <a:ext cx="10911515" cy="1080000"/>
           </a:xfrm>
           <a:prstGeom prst="roundRect">
             <a:avLst>
@@ -15432,9 +15432,9 @@
           <a:solidFill>
             <a:srgbClr val="FFFFFF"/>
           </a:solidFill>
-          <a:ln w="6350">
+          <a:ln w="12700">
             <a:solidFill>
-              <a:srgbClr val="E5E7EB"/>
+              <a:srgbClr val="7857FF"/>
             </a:solidFill>
           </a:ln>
           <a:effectLst/>
@@ -15469,8 +15469,8 @@
         </p:nvSpPr>
         <p:spPr>
           <a:xfrm>
-            <a:off x="880080" y="5420360"/>
-            <a:ext cx="3023838" cy="320000"/>
+            <a:off x="1000080" y="5330360"/>
+            <a:ext cx="2600000" cy="200000"/>
           </a:xfrm>
           <a:prstGeom prst="rect">
             <a:avLst/>
@@ -15485,7 +15485,42 @@
           <a:p>
             <a:pPr algn="l"/>
             <a:r>
-              <a:rPr sz="2200" b="1" i="0">
+              <a:rPr sz="900" b="1" i="0">
+                <a:solidFill>
+                  <a:srgbClr val="9CA3AF"/>
+                </a:solidFill>
+                <a:latin typeface="Inter"/>
+              </a:rPr>
+              <a:t>OF BRANDS</a:t>
+            </a:r>
+          </a:p>
+        </p:txBody>
+      </p:sp>
+      <p:sp>
+        <p:nvSpPr>
+          <p:cNvPr id="110" name="TextBox 109"/>
+          <p:cNvSpPr txBox="1"/>
+          <p:nvPr/>
+        </p:nvSpPr>
+        <p:spPr>
+          <a:xfrm>
+            <a:off x="1000080" y="5530360"/>
+            <a:ext cx="2600000" cy="540000"/>
+          </a:xfrm>
+          <a:prstGeom prst="rect">
+            <a:avLst/>
+          </a:prstGeom>
+          <a:noFill/>
+        </p:spPr>
+        <p:txBody>
+          <a:bodyPr wrap="square" lIns="0" rIns="0" tIns="0" bIns="0">
+            <a:spAutoFit/>
+          </a:bodyPr>
+          <a:lstStyle/>
+          <a:p>
+            <a:pPr algn="l"/>
+            <a:r>
+              <a:rPr sz="3600" b="1" i="0">
                 <a:solidFill>
                   <a:srgbClr val="7857FF"/>
                 </a:solidFill>
@@ -15498,14 +15533,14 @@
       </p:sp>
       <p:sp>
         <p:nvSpPr>
-          <p:cNvPr id="110" name="TextBox 109"/>
+          <p:cNvPr id="111" name="TextBox 110"/>
           <p:cNvSpPr txBox="1"/>
           <p:nvPr/>
         </p:nvSpPr>
         <p:spPr>
           <a:xfrm>
-            <a:off x="880080" y="5780360"/>
-            <a:ext cx="3023838" cy="240000"/>
+            <a:off x="4140080" y="5350360"/>
+            <a:ext cx="7211515" cy="280000"/>
           </a:xfrm>
           <a:prstGeom prst="rect">
             <a:avLst/>
@@ -15520,27 +15555,27 @@
           <a:p>
             <a:pPr algn="l"/>
             <a:r>
-              <a:rPr sz="900" b="0" i="0">
+              <a:rPr sz="1500" b="1" i="0">
                 <a:solidFill>
-                  <a:srgbClr val="6B7280"/>
+                  <a:srgbClr val="0A0A0A"/>
                 </a:solidFill>
                 <a:latin typeface="Inter"/>
               </a:rPr>
-              <a:t>Brands now prefer performance pay (vs. 52% in 2023).</a:t>
+              <a:t>now prefer performance-based payment over flat-rate.</a:t>
             </a:r>
           </a:p>
         </p:txBody>
       </p:sp>
       <p:sp>
         <p:nvSpPr>
-          <p:cNvPr id="111" name="TextBox 110"/>
+          <p:cNvPr id="112" name="TextBox 111"/>
           <p:cNvSpPr txBox="1"/>
           <p:nvPr/>
         </p:nvSpPr>
         <p:spPr>
           <a:xfrm>
-            <a:off x="880080" y="5970360"/>
-            <a:ext cx="3023838" cy="200000"/>
+            <a:off x="4140080" y="5690360"/>
+            <a:ext cx="7211515" cy="240000"/>
           </a:xfrm>
           <a:prstGeom prst="rect">
             <a:avLst/>
@@ -15555,62 +15590,14 @@
           <a:p>
             <a:pPr algn="l"/>
             <a:r>
-              <a:rPr sz="800" b="0" i="1">
+              <a:rPr sz="1100" b="0" i="0">
                 <a:solidFill>
-                  <a:srgbClr val="9CA3AF"/>
+                  <a:srgbClr val="6B7280"/>
                 </a:solidFill>
                 <a:latin typeface="Inter"/>
               </a:rPr>
-              <a:t>Influencer Marketing Hub, 2026.</a:t>
+              <a:t>Up from 52% in 2023. The contrarian model is now the consensus.</a:t>
             </a:r>
-          </a:p>
-        </p:txBody>
-      </p:sp>
-      <p:sp>
-        <p:nvSpPr>
-          <p:cNvPr id="112" name="Rounded Rectangle 111"/>
-          <p:cNvSpPr/>
-          <p:nvPr/>
-        </p:nvSpPr>
-        <p:spPr>
-          <a:xfrm>
-            <a:off x="4343918" y="5310360"/>
-            <a:ext cx="3503838" cy="900000"/>
-          </a:xfrm>
-          <a:prstGeom prst="roundRect">
-            <a:avLst>
-              <a:gd name="adj" fmla="val 4000"/>
-            </a:avLst>
-          </a:prstGeom>
-          <a:solidFill>
-            <a:srgbClr val="FFFFFF"/>
-          </a:solidFill>
-          <a:ln w="6350">
-            <a:solidFill>
-              <a:srgbClr val="E5E7EB"/>
-            </a:solidFill>
-          </a:ln>
-          <a:effectLst/>
-        </p:spPr>
-        <p:style>
-          <a:lnRef idx="1">
-            <a:schemeClr val="accent1"/>
-          </a:lnRef>
-          <a:fillRef idx="3">
-            <a:schemeClr val="accent1"/>
-          </a:fillRef>
-          <a:effectRef idx="2">
-            <a:schemeClr val="accent1"/>
-          </a:effectRef>
-          <a:fontRef idx="minor">
-            <a:schemeClr val="lt1"/>
-          </a:fontRef>
-        </p:style>
-        <p:txBody>
-          <a:bodyPr rtlCol="0" anchor="ctr"/>
-          <a:lstStyle/>
-          <a:p>
-            <a:pPr algn="ctr"/>
           </a:p>
         </p:txBody>
       </p:sp>
@@ -15622,8 +15609,8 @@
         </p:nvSpPr>
         <p:spPr>
           <a:xfrm>
-            <a:off x="4583918" y="5420360"/>
-            <a:ext cx="3023838" cy="320000"/>
+            <a:off x="4140080" y="5970360"/>
+            <a:ext cx="7211515" cy="200000"/>
           </a:xfrm>
           <a:prstGeom prst="rect">
             <a:avLst/>
@@ -15638,13 +15625,13 @@
           <a:p>
             <a:pPr algn="l"/>
             <a:r>
-              <a:rPr sz="2200" b="1" i="0">
+              <a:rPr sz="900" b="0" i="1">
                 <a:solidFill>
-                  <a:srgbClr val="7857FF"/>
+                  <a:srgbClr val="9CA3AF"/>
                 </a:solidFill>
                 <a:latin typeface="Inter"/>
               </a:rPr>
-              <a:t>21–33%</a:t>
+              <a:t>Source: Influencer Marketing Hub, 2026.</a:t>
             </a:r>
           </a:p>
         </p:txBody>
@@ -15652,229 +15639,6 @@
       <p:sp>
         <p:nvSpPr>
           <p:cNvPr id="114" name="TextBox 113"/>
-          <p:cNvSpPr txBox="1"/>
-          <p:nvPr/>
-        </p:nvSpPr>
-        <p:spPr>
-          <a:xfrm>
-            <a:off x="4583918" y="5780360"/>
-            <a:ext cx="3023838" cy="240000"/>
-          </a:xfrm>
-          <a:prstGeom prst="rect">
-            <a:avLst/>
-          </a:prstGeom>
-          <a:noFill/>
-        </p:spPr>
-        <p:txBody>
-          <a:bodyPr wrap="square" lIns="0" rIns="0" tIns="0" bIns="0">
-            <a:spAutoFit/>
-          </a:bodyPr>
-          <a:lstStyle/>
-          <a:p>
-            <a:pPr algn="l"/>
-            <a:r>
-              <a:rPr sz="900" b="0" i="0">
-                <a:solidFill>
-                  <a:srgbClr val="6B7280"/>
-                </a:solidFill>
-                <a:latin typeface="Inter"/>
-              </a:rPr>
-              <a:t>of YouTube's feed is AI slop or brainrot content.</a:t>
-            </a:r>
-          </a:p>
-        </p:txBody>
-      </p:sp>
-      <p:sp>
-        <p:nvSpPr>
-          <p:cNvPr id="115" name="TextBox 114"/>
-          <p:cNvSpPr txBox="1"/>
-          <p:nvPr/>
-        </p:nvSpPr>
-        <p:spPr>
-          <a:xfrm>
-            <a:off x="4583918" y="5970360"/>
-            <a:ext cx="3023838" cy="200000"/>
-          </a:xfrm>
-          <a:prstGeom prst="rect">
-            <a:avLst/>
-          </a:prstGeom>
-          <a:noFill/>
-        </p:spPr>
-        <p:txBody>
-          <a:bodyPr wrap="square" lIns="0" rIns="0" tIns="0" bIns="0">
-            <a:spAutoFit/>
-          </a:bodyPr>
-          <a:lstStyle/>
-          <a:p>
-            <a:pPr algn="l"/>
-            <a:r>
-              <a:rPr sz="800" b="0" i="1">
-                <a:solidFill>
-                  <a:srgbClr val="9CA3AF"/>
-                </a:solidFill>
-                <a:latin typeface="Inter"/>
-              </a:rPr>
-              <a:t>Kapwing, 2026.</a:t>
-            </a:r>
-          </a:p>
-        </p:txBody>
-      </p:sp>
-      <p:sp>
-        <p:nvSpPr>
-          <p:cNvPr id="116" name="Rounded Rectangle 115"/>
-          <p:cNvSpPr/>
-          <p:nvPr/>
-        </p:nvSpPr>
-        <p:spPr>
-          <a:xfrm>
-            <a:off x="8047756" y="5310360"/>
-            <a:ext cx="3503838" cy="900000"/>
-          </a:xfrm>
-          <a:prstGeom prst="roundRect">
-            <a:avLst>
-              <a:gd name="adj" fmla="val 4000"/>
-            </a:avLst>
-          </a:prstGeom>
-          <a:solidFill>
-            <a:srgbClr val="FFFFFF"/>
-          </a:solidFill>
-          <a:ln w="6350">
-            <a:solidFill>
-              <a:srgbClr val="E5E7EB"/>
-            </a:solidFill>
-          </a:ln>
-          <a:effectLst/>
-        </p:spPr>
-        <p:style>
-          <a:lnRef idx="1">
-            <a:schemeClr val="accent1"/>
-          </a:lnRef>
-          <a:fillRef idx="3">
-            <a:schemeClr val="accent1"/>
-          </a:fillRef>
-          <a:effectRef idx="2">
-            <a:schemeClr val="accent1"/>
-          </a:effectRef>
-          <a:fontRef idx="minor">
-            <a:schemeClr val="lt1"/>
-          </a:fontRef>
-        </p:style>
-        <p:txBody>
-          <a:bodyPr rtlCol="0" anchor="ctr"/>
-          <a:lstStyle/>
-          <a:p>
-            <a:pPr algn="ctr"/>
-          </a:p>
-        </p:txBody>
-      </p:sp>
-      <p:sp>
-        <p:nvSpPr>
-          <p:cNvPr id="117" name="TextBox 116"/>
-          <p:cNvSpPr txBox="1"/>
-          <p:nvPr/>
-        </p:nvSpPr>
-        <p:spPr>
-          <a:xfrm>
-            <a:off x="8287756" y="5420360"/>
-            <a:ext cx="3023838" cy="320000"/>
-          </a:xfrm>
-          <a:prstGeom prst="rect">
-            <a:avLst/>
-          </a:prstGeom>
-          <a:noFill/>
-        </p:spPr>
-        <p:txBody>
-          <a:bodyPr wrap="square" lIns="0" rIns="0" tIns="0" bIns="0">
-            <a:spAutoFit/>
-          </a:bodyPr>
-          <a:lstStyle/>
-          <a:p>
-            <a:pPr algn="l"/>
-            <a:r>
-              <a:rPr sz="2200" b="1" i="0">
-                <a:solidFill>
-                  <a:srgbClr val="7857FF"/>
-                </a:solidFill>
-                <a:latin typeface="Inter"/>
-              </a:rPr>
-              <a:t>26%</a:t>
-            </a:r>
-          </a:p>
-        </p:txBody>
-      </p:sp>
-      <p:sp>
-        <p:nvSpPr>
-          <p:cNvPr id="118" name="TextBox 117"/>
-          <p:cNvSpPr txBox="1"/>
-          <p:nvPr/>
-        </p:nvSpPr>
-        <p:spPr>
-          <a:xfrm>
-            <a:off x="8287756" y="5780360"/>
-            <a:ext cx="3023838" cy="240000"/>
-          </a:xfrm>
-          <a:prstGeom prst="rect">
-            <a:avLst/>
-          </a:prstGeom>
-          <a:noFill/>
-        </p:spPr>
-        <p:txBody>
-          <a:bodyPr wrap="square" lIns="0" rIns="0" tIns="0" bIns="0">
-            <a:spAutoFit/>
-          </a:bodyPr>
-          <a:lstStyle/>
-          <a:p>
-            <a:pPr algn="l"/>
-            <a:r>
-              <a:rPr sz="900" b="0" i="0">
-                <a:solidFill>
-                  <a:srgbClr val="6B7280"/>
-                </a:solidFill>
-                <a:latin typeface="Inter"/>
-              </a:rPr>
-              <a:t>of consumers prefer AI creator content (was 60% in '23).</a:t>
-            </a:r>
-          </a:p>
-        </p:txBody>
-      </p:sp>
-      <p:sp>
-        <p:nvSpPr>
-          <p:cNvPr id="119" name="TextBox 118"/>
-          <p:cNvSpPr txBox="1"/>
-          <p:nvPr/>
-        </p:nvSpPr>
-        <p:spPr>
-          <a:xfrm>
-            <a:off x="8287756" y="5970360"/>
-            <a:ext cx="3023838" cy="200000"/>
-          </a:xfrm>
-          <a:prstGeom prst="rect">
-            <a:avLst/>
-          </a:prstGeom>
-          <a:noFill/>
-        </p:spPr>
-        <p:txBody>
-          <a:bodyPr wrap="square" lIns="0" rIns="0" tIns="0" bIns="0">
-            <a:spAutoFit/>
-          </a:bodyPr>
-          <a:lstStyle/>
-          <a:p>
-            <a:pPr algn="l"/>
-            <a:r>
-              <a:rPr sz="800" b="0" i="1">
-                <a:solidFill>
-                  <a:srgbClr val="9CA3AF"/>
-                </a:solidFill>
-                <a:latin typeface="Inter"/>
-              </a:rPr>
-              <a:t>Billion Dollar Boy / Digiday, 2026.</a:t>
-            </a:r>
-          </a:p>
-        </p:txBody>
-      </p:sp>
-      <p:sp>
-        <p:nvSpPr>
-          <p:cNvPr id="120" name="TextBox 119"/>
           <p:cNvSpPr txBox="1"/>
           <p:nvPr/>
         </p:nvSpPr>
